--- a/Presentation.pptx
+++ b/Presentation.pptx
@@ -5,7 +5,7 @@
     <p:sldMasterId id="2147483674" r:id="rId1"/>
   </p:sldMasterIdLst>
   <p:notesMasterIdLst>
-    <p:notesMasterId r:id="rId10"/>
+    <p:notesMasterId r:id="rId11"/>
   </p:notesMasterIdLst>
   <p:sldIdLst>
     <p:sldId id="257" r:id="rId2"/>
@@ -13,9 +13,10 @@
     <p:sldId id="259" r:id="rId4"/>
     <p:sldId id="265" r:id="rId5"/>
     <p:sldId id="262" r:id="rId6"/>
-    <p:sldId id="263" r:id="rId7"/>
-    <p:sldId id="266" r:id="rId8"/>
-    <p:sldId id="264" r:id="rId9"/>
+    <p:sldId id="267" r:id="rId7"/>
+    <p:sldId id="263" r:id="rId8"/>
+    <p:sldId id="266" r:id="rId9"/>
+    <p:sldId id="264" r:id="rId10"/>
   </p:sldIdLst>
   <p:sldSz cx="12192000" cy="6858000"/>
   <p:notesSz cx="6858000" cy="9144000"/>
@@ -4970,22 +4971,6 @@
             </a:r>
           </a:p>
           <a:p>
-            <a:pPr lvl="1">
-              <a:buFont typeface="Wingdings" pitchFamily="2" charset="2"/>
-              <a:buChar char="§"/>
-            </a:pPr>
-            <a:r>
-              <a:rPr lang="en-US" sz="2600" dirty="0">
-                <a:solidFill>
-                  <a:schemeClr val="accent6"/>
-                </a:solidFill>
-                <a:latin typeface="Aharoni" panose="02010803020104030203" pitchFamily="2" charset="-79"/>
-                <a:cs typeface="Aharoni" panose="02010803020104030203" pitchFamily="2" charset="-79"/>
-              </a:rPr>
-              <a:t>Open it up for mixed 2go</a:t>
-            </a:r>
-          </a:p>
-          <a:p>
             <a:pPr>
               <a:buFont typeface="Wingdings" pitchFamily="2" charset="2"/>
               <a:buChar char="§"/>
@@ -5110,7 +5095,27 @@
                 <a:latin typeface="Aharoni" panose="02010803020104030203" pitchFamily="2" charset="-79"/>
                 <a:cs typeface="Aharoni" panose="02010803020104030203" pitchFamily="2" charset="-79"/>
               </a:rPr>
-              <a:t>Book Taxi</a:t>
+              <a:t>Book Taxi (</a:t>
+            </a:r>
+            <a:r>
+              <a:rPr lang="en-US" sz="3000" dirty="0" err="1">
+                <a:solidFill>
+                  <a:schemeClr val="bg1"/>
+                </a:solidFill>
+                <a:latin typeface="Aharoni" panose="02010803020104030203" pitchFamily="2" charset="-79"/>
+                <a:cs typeface="Aharoni" panose="02010803020104030203" pitchFamily="2" charset="-79"/>
+              </a:rPr>
+              <a:t>Sixt</a:t>
+            </a:r>
+            <a:r>
+              <a:rPr lang="en-US" sz="3000" dirty="0">
+                <a:solidFill>
+                  <a:schemeClr val="bg1"/>
+                </a:solidFill>
+                <a:latin typeface="Aharoni" panose="02010803020104030203" pitchFamily="2" charset="-79"/>
+                <a:cs typeface="Aharoni" panose="02010803020104030203" pitchFamily="2" charset="-79"/>
+              </a:rPr>
+              <a:t> Ride)</a:t>
             </a:r>
           </a:p>
           <a:p>
@@ -5120,9 +5125,6 @@
             </a:pPr>
             <a:r>
               <a:rPr lang="en-US" sz="2600" dirty="0">
-                <a:solidFill>
-                  <a:schemeClr val="accent6"/>
-                </a:solidFill>
                 <a:latin typeface="Aharoni" panose="02010803020104030203" pitchFamily="2" charset="-79"/>
                 <a:cs typeface="Aharoni" panose="02010803020104030203" pitchFamily="2" charset="-79"/>
               </a:rPr>
@@ -5130,9 +5132,6 @@
             </a:r>
             <a:r>
               <a:rPr lang="en-US" sz="2600" dirty="0" err="1">
-                <a:solidFill>
-                  <a:schemeClr val="accent6"/>
-                </a:solidFill>
                 <a:latin typeface="Aharoni" panose="02010803020104030203" pitchFamily="2" charset="-79"/>
                 <a:cs typeface="Aharoni" panose="02010803020104030203" pitchFamily="2" charset="-79"/>
               </a:rPr>
@@ -5140,13 +5139,10 @@
             </a:r>
             <a:r>
               <a:rPr lang="en-US" sz="2600" dirty="0">
-                <a:solidFill>
-                  <a:schemeClr val="accent6"/>
-                </a:solidFill>
-                <a:latin typeface="Aharoni" panose="02010803020104030203" pitchFamily="2" charset="-79"/>
-                <a:cs typeface="Aharoni" panose="02010803020104030203" pitchFamily="2" charset="-79"/>
-              </a:rPr>
-              <a:t> mixed 2go</a:t>
+                <a:latin typeface="Aharoni" panose="02010803020104030203" pitchFamily="2" charset="-79"/>
+                <a:cs typeface="Aharoni" panose="02010803020104030203" pitchFamily="2" charset="-79"/>
+              </a:rPr>
+              <a:t> Mixed 2go</a:t>
             </a:r>
           </a:p>
           <a:p>
@@ -5169,9 +5165,6 @@
             </a:pPr>
             <a:r>
               <a:rPr lang="en-US" sz="3000" dirty="0">
-                <a:solidFill>
-                  <a:schemeClr val="accent6"/>
-                </a:solidFill>
                 <a:latin typeface="Aharoni" panose="02010803020104030203" pitchFamily="2" charset="-79"/>
                 <a:cs typeface="Aharoni" panose="02010803020104030203" pitchFamily="2" charset="-79"/>
               </a:rPr>
@@ -5179,9 +5172,6 @@
             </a:r>
             <a:r>
               <a:rPr lang="en-US" sz="3000" dirty="0" err="1">
-                <a:solidFill>
-                  <a:schemeClr val="accent6"/>
-                </a:solidFill>
                 <a:latin typeface="Aharoni" panose="02010803020104030203" pitchFamily="2" charset="-79"/>
                 <a:cs typeface="Aharoni" panose="02010803020104030203" pitchFamily="2" charset="-79"/>
               </a:rPr>
@@ -5189,9 +5179,6 @@
             </a:r>
             <a:r>
               <a:rPr lang="en-US" sz="3000" dirty="0">
-                <a:solidFill>
-                  <a:schemeClr val="accent6"/>
-                </a:solidFill>
                 <a:latin typeface="Aharoni" panose="02010803020104030203" pitchFamily="2" charset="-79"/>
                 <a:cs typeface="Aharoni" panose="02010803020104030203" pitchFamily="2" charset="-79"/>
               </a:rPr>
@@ -5199,9 +5186,6 @@
             </a:r>
             <a:r>
               <a:rPr lang="en-US" sz="3000" dirty="0" err="1">
-                <a:solidFill>
-                  <a:schemeClr val="accent6"/>
-                </a:solidFill>
                 <a:latin typeface="Aharoni" panose="02010803020104030203" pitchFamily="2" charset="-79"/>
                 <a:cs typeface="Aharoni" panose="02010803020104030203" pitchFamily="2" charset="-79"/>
               </a:rPr>
@@ -5209,9 +5193,43 @@
             </a:r>
             <a:r>
               <a:rPr lang="en-US" sz="3000" dirty="0">
-                <a:solidFill>
-                  <a:schemeClr val="accent6"/>
-                </a:solidFill>
+                <a:latin typeface="Aharoni" panose="02010803020104030203" pitchFamily="2" charset="-79"/>
+                <a:cs typeface="Aharoni" panose="02010803020104030203" pitchFamily="2" charset="-79"/>
+              </a:rPr>
+              <a:t> mixed 2go</a:t>
+            </a:r>
+          </a:p>
+          <a:p>
+            <a:pPr>
+              <a:buFont typeface="Wingdings" pitchFamily="2" charset="2"/>
+              <a:buChar char="§"/>
+            </a:pPr>
+            <a:endParaRPr lang="en-US" sz="3000" dirty="0">
+              <a:latin typeface="Aharoni" panose="02010803020104030203" pitchFamily="2" charset="-79"/>
+              <a:cs typeface="Aharoni" panose="02010803020104030203" pitchFamily="2" charset="-79"/>
+            </a:endParaRPr>
+          </a:p>
+          <a:p>
+            <a:pPr>
+              <a:buFont typeface="Wingdings" pitchFamily="2" charset="2"/>
+              <a:buChar char="§"/>
+            </a:pPr>
+            <a:r>
+              <a:rPr lang="en-US" sz="3000" dirty="0">
+                <a:latin typeface="Aharoni" panose="02010803020104030203" pitchFamily="2" charset="-79"/>
+                <a:cs typeface="Aharoni" panose="02010803020104030203" pitchFamily="2" charset="-79"/>
+              </a:rPr>
+              <a:t>Join available Taxi with </a:t>
+            </a:r>
+            <a:r>
+              <a:rPr lang="en-US" sz="3000" dirty="0" err="1">
+                <a:latin typeface="Aharoni" panose="02010803020104030203" pitchFamily="2" charset="-79"/>
+                <a:cs typeface="Aharoni" panose="02010803020104030203" pitchFamily="2" charset="-79"/>
+              </a:rPr>
+              <a:t>Sixt</a:t>
+            </a:r>
+            <a:r>
+              <a:rPr lang="en-US" sz="3000" dirty="0">
                 <a:latin typeface="Aharoni" panose="02010803020104030203" pitchFamily="2" charset="-79"/>
                 <a:cs typeface="Aharoni" panose="02010803020104030203" pitchFamily="2" charset="-79"/>
               </a:rPr>
@@ -5231,35 +5249,6 @@
               <a:cs typeface="Aharoni" panose="02010803020104030203" pitchFamily="2" charset="-79"/>
             </a:endParaRPr>
           </a:p>
-          <a:p>
-            <a:pPr>
-              <a:buFont typeface="Wingdings" pitchFamily="2" charset="2"/>
-              <a:buChar char="§"/>
-            </a:pPr>
-            <a:r>
-              <a:rPr lang="en-US" sz="3000" dirty="0">
-                <a:solidFill>
-                  <a:schemeClr val="accent6"/>
-                </a:solidFill>
-                <a:latin typeface="Aharoni" panose="02010803020104030203" pitchFamily="2" charset="-79"/>
-                <a:cs typeface="Aharoni" panose="02010803020104030203" pitchFamily="2" charset="-79"/>
-              </a:rPr>
-              <a:t>Join available Taxi with sixed mixed 2go</a:t>
-            </a:r>
-          </a:p>
-          <a:p>
-            <a:pPr>
-              <a:buFont typeface="Wingdings" pitchFamily="2" charset="2"/>
-              <a:buChar char="§"/>
-            </a:pPr>
-            <a:endParaRPr lang="en-US" sz="3000" dirty="0">
-              <a:solidFill>
-                <a:schemeClr val="bg1"/>
-              </a:solidFill>
-              <a:latin typeface="Aharoni" panose="02010803020104030203" pitchFamily="2" charset="-79"/>
-              <a:cs typeface="Aharoni" panose="02010803020104030203" pitchFamily="2" charset="-79"/>
-            </a:endParaRPr>
-          </a:p>
         </p:txBody>
       </p:sp>
     </p:spTree>
@@ -5272,178 +5261,6 @@
   <p:clrMapOvr>
     <a:masterClrMapping/>
   </p:clrMapOvr>
-  <p:timing>
-    <p:tnLst>
-      <p:par>
-        <p:cTn id="1" dur="indefinite" restart="never" nodeType="tmRoot">
-          <p:childTnLst>
-            <p:seq concurrent="1" nextAc="seek">
-              <p:cTn id="2" dur="indefinite" nodeType="mainSeq">
-                <p:childTnLst>
-                  <p:par>
-                    <p:cTn id="3" fill="hold">
-                      <p:stCondLst>
-                        <p:cond delay="indefinite"/>
-                      </p:stCondLst>
-                      <p:childTnLst>
-                        <p:par>
-                          <p:cTn id="4" fill="hold">
-                            <p:stCondLst>
-                              <p:cond delay="0"/>
-                            </p:stCondLst>
-                            <p:childTnLst>
-                              <p:par>
-                                <p:cTn id="5" presetID="1" presetClass="entr" presetSubtype="0" fill="hold" nodeType="clickEffect">
-                                  <p:stCondLst>
-                                    <p:cond delay="0"/>
-                                  </p:stCondLst>
-                                  <p:childTnLst>
-                                    <p:set>
-                                      <p:cBhvr>
-                                        <p:cTn id="6" dur="1" fill="hold">
-                                          <p:stCondLst>
-                                            <p:cond delay="0"/>
-                                          </p:stCondLst>
-                                        </p:cTn>
-                                        <p:tgtEl>
-                                          <p:spTgt spid="7">
-                                            <p:txEl>
-                                              <p:pRg st="2" end="2"/>
-                                            </p:txEl>
-                                          </p:spTgt>
-                                        </p:tgtEl>
-                                        <p:attrNameLst>
-                                          <p:attrName>style.visibility</p:attrName>
-                                        </p:attrNameLst>
-                                      </p:cBhvr>
-                                      <p:to>
-                                        <p:strVal val="visible"/>
-                                      </p:to>
-                                    </p:set>
-                                  </p:childTnLst>
-                                </p:cTn>
-                              </p:par>
-                              <p:par>
-                                <p:cTn id="7" presetID="1" presetClass="entr" presetSubtype="0" fill="hold" nodeType="withEffect">
-                                  <p:stCondLst>
-                                    <p:cond delay="0"/>
-                                  </p:stCondLst>
-                                  <p:childTnLst>
-                                    <p:set>
-                                      <p:cBhvr>
-                                        <p:cTn id="8" dur="1" fill="hold">
-                                          <p:stCondLst>
-                                            <p:cond delay="0"/>
-                                          </p:stCondLst>
-                                        </p:cTn>
-                                        <p:tgtEl>
-                                          <p:spTgt spid="7">
-                                            <p:txEl>
-                                              <p:pRg st="4" end="4"/>
-                                            </p:txEl>
-                                          </p:spTgt>
-                                        </p:tgtEl>
-                                        <p:attrNameLst>
-                                          <p:attrName>style.visibility</p:attrName>
-                                        </p:attrNameLst>
-                                      </p:cBhvr>
-                                      <p:to>
-                                        <p:strVal val="visible"/>
-                                      </p:to>
-                                    </p:set>
-                                  </p:childTnLst>
-                                </p:cTn>
-                              </p:par>
-                              <p:par>
-                                <p:cTn id="9" presetID="1" presetClass="entr" presetSubtype="0" fill="hold" nodeType="withEffect">
-                                  <p:stCondLst>
-                                    <p:cond delay="0"/>
-                                  </p:stCondLst>
-                                  <p:childTnLst>
-                                    <p:set>
-                                      <p:cBhvr>
-                                        <p:cTn id="10" dur="1" fill="hold">
-                                          <p:stCondLst>
-                                            <p:cond delay="0"/>
-                                          </p:stCondLst>
-                                        </p:cTn>
-                                        <p:tgtEl>
-                                          <p:spTgt spid="7">
-                                            <p:txEl>
-                                              <p:pRg st="6" end="6"/>
-                                            </p:txEl>
-                                          </p:spTgt>
-                                        </p:tgtEl>
-                                        <p:attrNameLst>
-                                          <p:attrName>style.visibility</p:attrName>
-                                        </p:attrNameLst>
-                                      </p:cBhvr>
-                                      <p:to>
-                                        <p:strVal val="visible"/>
-                                      </p:to>
-                                    </p:set>
-                                  </p:childTnLst>
-                                </p:cTn>
-                              </p:par>
-                              <p:par>
-                                <p:cTn id="11" presetID="1" presetClass="entr" presetSubtype="0" fill="hold" nodeType="withEffect">
-                                  <p:stCondLst>
-                                    <p:cond delay="0"/>
-                                  </p:stCondLst>
-                                  <p:childTnLst>
-                                    <p:set>
-                                      <p:cBhvr>
-                                        <p:cTn id="12" dur="1" fill="hold">
-                                          <p:stCondLst>
-                                            <p:cond delay="0"/>
-                                          </p:stCondLst>
-                                        </p:cTn>
-                                        <p:tgtEl>
-                                          <p:spTgt spid="3">
-                                            <p:txEl>
-                                              <p:pRg st="4" end="4"/>
-                                            </p:txEl>
-                                          </p:spTgt>
-                                        </p:tgtEl>
-                                        <p:attrNameLst>
-                                          <p:attrName>style.visibility</p:attrName>
-                                        </p:attrNameLst>
-                                      </p:cBhvr>
-                                      <p:to>
-                                        <p:strVal val="visible"/>
-                                      </p:to>
-                                    </p:set>
-                                  </p:childTnLst>
-                                </p:cTn>
-                              </p:par>
-                            </p:childTnLst>
-                          </p:cTn>
-                        </p:par>
-                      </p:childTnLst>
-                    </p:cTn>
-                  </p:par>
-                </p:childTnLst>
-              </p:cTn>
-              <p:prevCondLst>
-                <p:cond evt="onPrev" delay="0">
-                  <p:tgtEl>
-                    <p:sldTgt/>
-                  </p:tgtEl>
-                </p:cond>
-              </p:prevCondLst>
-              <p:nextCondLst>
-                <p:cond evt="onNext" delay="0">
-                  <p:tgtEl>
-                    <p:sldTgt/>
-                  </p:tgtEl>
-                </p:cond>
-              </p:nextCondLst>
-            </p:seq>
-          </p:childTnLst>
-        </p:cTn>
-      </p:par>
-    </p:tnLst>
-  </p:timing>
 </p:sld>
 </file>
 
@@ -5493,7 +5310,43 @@
                 <a:latin typeface="Aharoni" panose="02010803020104030203" pitchFamily="2" charset="-79"/>
                 <a:cs typeface="Aharoni" panose="02010803020104030203" pitchFamily="2" charset="-79"/>
               </a:rPr>
-              <a:t>Work Hand in Hand</a:t>
+              <a:t>New Possible Booking Options</a:t>
+            </a:r>
+          </a:p>
+        </p:txBody>
+      </p:sp>
+      <p:sp>
+        <p:nvSpPr>
+          <p:cNvPr id="5" name="Text Placeholder 4">
+            <a:extLst>
+              <a:ext uri="{FF2B5EF4-FFF2-40B4-BE49-F238E27FC236}">
+                <a16:creationId xmlns:a16="http://schemas.microsoft.com/office/drawing/2014/main" id="{B3D47084-3FBD-F04E-A482-A562B733FAAD}"/>
+              </a:ext>
+            </a:extLst>
+          </p:cNvPr>
+          <p:cNvSpPr>
+            <a:spLocks noGrp="1"/>
+          </p:cNvSpPr>
+          <p:nvPr>
+            <p:ph type="body" idx="1"/>
+          </p:nvPr>
+        </p:nvSpPr>
+        <p:spPr/>
+        <p:txBody>
+          <a:bodyPr>
+            <a:normAutofit/>
+          </a:bodyPr>
+          <a:lstStyle/>
+          <a:p>
+            <a:r>
+              <a:rPr lang="en-US" sz="3200" dirty="0">
+                <a:solidFill>
+                  <a:srgbClr val="FF5F00"/>
+                </a:solidFill>
+                <a:latin typeface="Aharoni" panose="02010803020104030203" pitchFamily="2" charset="-79"/>
+                <a:cs typeface="Aharoni" panose="02010803020104030203" pitchFamily="2" charset="-79"/>
+              </a:rPr>
+              <a:t>Be the driver</a:t>
             </a:r>
           </a:p>
         </p:txBody>
@@ -5511,75 +5364,21 @@
             <a:spLocks noGrp="1"/>
           </p:cNvSpPr>
           <p:nvPr>
-            <p:ph idx="1"/>
+            <p:ph sz="half" idx="2"/>
           </p:nvPr>
         </p:nvSpPr>
         <p:spPr/>
         <p:txBody>
-          <a:bodyPr/>
-          <a:lstStyle/>
-          <a:p>
-            <a:pPr marL="514350" indent="-514350">
-              <a:buFont typeface="+mj-lt"/>
-              <a:buAutoNum type="arabicPeriod"/>
+          <a:bodyPr>
+            <a:normAutofit fontScale="92500" lnSpcReduction="20000"/>
+          </a:bodyPr>
+          <a:lstStyle/>
+          <a:p>
+            <a:pPr>
+              <a:buFont typeface="Wingdings" pitchFamily="2" charset="2"/>
+              <a:buChar char="§"/>
             </a:pPr>
-            <a:r>
-              <a:rPr lang="en-US" sz="3600" dirty="0">
-                <a:solidFill>
-                  <a:schemeClr val="bg1"/>
-                </a:solidFill>
-                <a:latin typeface="Aharoni" panose="02010803020104030203" pitchFamily="2" charset="-79"/>
-                <a:cs typeface="Aharoni" panose="02010803020104030203" pitchFamily="2" charset="-79"/>
-              </a:rPr>
-              <a:t>Alice books a suggested </a:t>
-            </a:r>
-            <a:r>
-              <a:rPr lang="en-US" sz="3600" dirty="0" err="1">
-                <a:solidFill>
-                  <a:schemeClr val="bg1"/>
-                </a:solidFill>
-                <a:latin typeface="Aharoni" panose="02010803020104030203" pitchFamily="2" charset="-79"/>
-                <a:cs typeface="Aharoni" panose="02010803020104030203" pitchFamily="2" charset="-79"/>
-              </a:rPr>
-              <a:t>Sixt</a:t>
-            </a:r>
-            <a:r>
-              <a:rPr lang="en-US" sz="3600" dirty="0">
-                <a:solidFill>
-                  <a:schemeClr val="bg1"/>
-                </a:solidFill>
-                <a:latin typeface="Aharoni" panose="02010803020104030203" pitchFamily="2" charset="-79"/>
-                <a:cs typeface="Aharoni" panose="02010803020104030203" pitchFamily="2" charset="-79"/>
-              </a:rPr>
-              <a:t> Share trip ahead with </a:t>
-            </a:r>
-            <a:r>
-              <a:rPr lang="en-US" sz="3600" dirty="0" err="1">
-                <a:solidFill>
-                  <a:schemeClr val="bg1"/>
-                </a:solidFill>
-                <a:latin typeface="Aharoni" panose="02010803020104030203" pitchFamily="2" charset="-79"/>
-                <a:cs typeface="Aharoni" panose="02010803020104030203" pitchFamily="2" charset="-79"/>
-              </a:rPr>
-              <a:t>Sixt</a:t>
-            </a:r>
-            <a:r>
-              <a:rPr lang="en-US" sz="3600" dirty="0">
-                <a:solidFill>
-                  <a:schemeClr val="bg1"/>
-                </a:solidFill>
-                <a:latin typeface="Aharoni" panose="02010803020104030203" pitchFamily="2" charset="-79"/>
-                <a:cs typeface="Aharoni" panose="02010803020104030203" pitchFamily="2" charset="-79"/>
-              </a:rPr>
-              <a:t> Calendar, opens it up for mixed</a:t>
-            </a:r>
-          </a:p>
-          <a:p>
-            <a:pPr marL="514350" indent="-514350">
-              <a:buFont typeface="+mj-lt"/>
-              <a:buAutoNum type="arabicPeriod"/>
-            </a:pPr>
-            <a:endParaRPr lang="en-US" sz="3600" dirty="0">
+            <a:endParaRPr lang="en-US" sz="3000" dirty="0">
               <a:solidFill>
                 <a:schemeClr val="bg1"/>
               </a:solidFill>
@@ -5588,41 +5387,27 @@
             </a:endParaRPr>
           </a:p>
           <a:p>
-            <a:pPr marL="514350" indent="-514350">
-              <a:buFont typeface="+mj-lt"/>
-              <a:buAutoNum type="arabicPeriod"/>
+            <a:pPr>
+              <a:buFont typeface="Wingdings" pitchFamily="2" charset="2"/>
+              <a:buChar char="§"/>
             </a:pPr>
             <a:r>
-              <a:rPr lang="en-US" sz="3600" dirty="0">
+              <a:rPr lang="en-US" sz="3000" dirty="0">
                 <a:solidFill>
                   <a:schemeClr val="bg1"/>
                 </a:solidFill>
                 <a:latin typeface="Aharoni" panose="02010803020104030203" pitchFamily="2" charset="-79"/>
                 <a:cs typeface="Aharoni" panose="02010803020104030203" pitchFamily="2" charset="-79"/>
               </a:rPr>
-              <a:t>Bob joins Alice trip, seeing it as an option in </a:t>
-            </a:r>
-            <a:r>
-              <a:rPr lang="en-US" sz="3600" dirty="0" err="1">
-                <a:solidFill>
-                  <a:schemeClr val="bg1"/>
-                </a:solidFill>
-                <a:latin typeface="Aharoni" panose="02010803020104030203" pitchFamily="2" charset="-79"/>
-                <a:cs typeface="Aharoni" panose="02010803020104030203" pitchFamily="2" charset="-79"/>
-              </a:rPr>
-              <a:t>Sixt</a:t>
-            </a:r>
-            <a:r>
-              <a:rPr lang="en-US" sz="3600" dirty="0">
-                <a:solidFill>
-                  <a:schemeClr val="bg1"/>
-                </a:solidFill>
-                <a:latin typeface="Aharoni" panose="02010803020104030203" pitchFamily="2" charset="-79"/>
-                <a:cs typeface="Aharoni" panose="02010803020104030203" pitchFamily="2" charset="-79"/>
-              </a:rPr>
-              <a:t> Mixed 2go</a:t>
-            </a:r>
-            <a:endParaRPr lang="en-US" sz="3200" dirty="0">
+              <a:t>Rent a car</a:t>
+            </a:r>
+          </a:p>
+          <a:p>
+            <a:pPr>
+              <a:buFont typeface="Wingdings" pitchFamily="2" charset="2"/>
+              <a:buChar char="§"/>
+            </a:pPr>
+            <a:endParaRPr lang="en-US" sz="3000" dirty="0">
               <a:solidFill>
                 <a:schemeClr val="bg1"/>
               </a:solidFill>
@@ -5631,11 +5416,63 @@
             </a:endParaRPr>
           </a:p>
           <a:p>
-            <a:pPr marL="514350" indent="-514350">
-              <a:buFont typeface="+mj-lt"/>
-              <a:buAutoNum type="arabicPeriod"/>
+            <a:pPr>
+              <a:buFont typeface="Wingdings" pitchFamily="2" charset="2"/>
+              <a:buChar char="§"/>
             </a:pPr>
-            <a:endParaRPr lang="en-US" sz="3600" dirty="0">
+            <a:r>
+              <a:rPr lang="en-US" sz="3000" dirty="0">
+                <a:solidFill>
+                  <a:schemeClr val="bg1"/>
+                </a:solidFill>
+                <a:latin typeface="Aharoni" panose="02010803020104030203" pitchFamily="2" charset="-79"/>
+                <a:cs typeface="Aharoni" panose="02010803020104030203" pitchFamily="2" charset="-79"/>
+              </a:rPr>
+              <a:t>Books </a:t>
+            </a:r>
+            <a:r>
+              <a:rPr lang="en-US" sz="3000" dirty="0" err="1">
+                <a:solidFill>
+                  <a:schemeClr val="bg1"/>
+                </a:solidFill>
+                <a:latin typeface="Aharoni" panose="02010803020104030203" pitchFamily="2" charset="-79"/>
+                <a:cs typeface="Aharoni" panose="02010803020104030203" pitchFamily="2" charset="-79"/>
+              </a:rPr>
+              <a:t>Sixt</a:t>
+            </a:r>
+            <a:r>
+              <a:rPr lang="en-US" sz="3000" dirty="0">
+                <a:solidFill>
+                  <a:schemeClr val="bg1"/>
+                </a:solidFill>
+                <a:latin typeface="Aharoni" panose="02010803020104030203" pitchFamily="2" charset="-79"/>
+                <a:cs typeface="Aharoni" panose="02010803020104030203" pitchFamily="2" charset="-79"/>
+              </a:rPr>
+              <a:t> Share </a:t>
+            </a:r>
+          </a:p>
+          <a:p>
+            <a:pPr lvl="1">
+              <a:buFont typeface="Wingdings" pitchFamily="2" charset="2"/>
+              <a:buChar char="§"/>
+            </a:pPr>
+            <a:r>
+              <a:rPr lang="en-US" sz="2600" dirty="0">
+                <a:solidFill>
+                  <a:schemeClr val="accent6"/>
+                </a:solidFill>
+                <a:latin typeface="Aharoni" panose="02010803020104030203" pitchFamily="2" charset="-79"/>
+                <a:cs typeface="Aharoni" panose="02010803020104030203" pitchFamily="2" charset="-79"/>
+              </a:rPr>
+              <a:t>Open it up for mixed 2go</a:t>
+            </a:r>
+          </a:p>
+          <a:p>
+            <a:pPr>
+              <a:buFont typeface="Wingdings" pitchFamily="2" charset="2"/>
+              <a:buChar char="§"/>
+            </a:pPr>
+            <a:endParaRPr lang="en-US" sz="3000" dirty="0">
               <a:solidFill>
                 <a:schemeClr val="bg1"/>
               </a:solidFill>
@@ -5644,11 +5481,11 @@
             </a:endParaRPr>
           </a:p>
           <a:p>
-            <a:pPr marL="514350" indent="-514350">
-              <a:buFont typeface="+mj-lt"/>
-              <a:buAutoNum type="arabicPeriod"/>
+            <a:pPr lvl="2">
+              <a:buFont typeface="Wingdings" pitchFamily="2" charset="2"/>
+              <a:buChar char="§"/>
             </a:pPr>
-            <a:endParaRPr lang="en-US" sz="3200" dirty="0">
+            <a:endParaRPr lang="en-US" sz="2400" dirty="0">
               <a:solidFill>
                 <a:schemeClr val="bg1"/>
               </a:solidFill>
@@ -5657,14 +5494,300 @@
             </a:endParaRPr>
           </a:p>
           <a:p>
-            <a:endParaRPr lang="en-US" dirty="0"/>
+            <a:pPr lvl="2">
+              <a:buFont typeface="Wingdings" pitchFamily="2" charset="2"/>
+              <a:buChar char="§"/>
+            </a:pPr>
+            <a:endParaRPr lang="en-US" sz="2400" dirty="0">
+              <a:solidFill>
+                <a:schemeClr val="bg1"/>
+              </a:solidFill>
+              <a:latin typeface="Aharoni" panose="02010803020104030203" pitchFamily="2" charset="-79"/>
+              <a:cs typeface="Aharoni" panose="02010803020104030203" pitchFamily="2" charset="-79"/>
+            </a:endParaRPr>
+          </a:p>
+        </p:txBody>
+      </p:sp>
+      <p:sp>
+        <p:nvSpPr>
+          <p:cNvPr id="6" name="Text Placeholder 5">
+            <a:extLst>
+              <a:ext uri="{FF2B5EF4-FFF2-40B4-BE49-F238E27FC236}">
+                <a16:creationId xmlns:a16="http://schemas.microsoft.com/office/drawing/2014/main" id="{52BBF77E-B078-FD49-818E-C8FAD299631E}"/>
+              </a:ext>
+            </a:extLst>
+          </p:cNvPr>
+          <p:cNvSpPr>
+            <a:spLocks noGrp="1"/>
+          </p:cNvSpPr>
+          <p:nvPr>
+            <p:ph type="body" sz="quarter" idx="3"/>
+          </p:nvPr>
+        </p:nvSpPr>
+        <p:spPr/>
+        <p:txBody>
+          <a:bodyPr>
+            <a:normAutofit/>
+          </a:bodyPr>
+          <a:lstStyle/>
+          <a:p>
+            <a:r>
+              <a:rPr lang="en-US" sz="3200" dirty="0">
+                <a:solidFill>
+                  <a:srgbClr val="FF5F00"/>
+                </a:solidFill>
+                <a:latin typeface="Aharoni" panose="02010803020104030203" pitchFamily="2" charset="-79"/>
+                <a:cs typeface="Aharoni" panose="02010803020104030203" pitchFamily="2" charset="-79"/>
+              </a:rPr>
+              <a:t>Be the passenger</a:t>
+            </a:r>
+          </a:p>
+        </p:txBody>
+      </p:sp>
+      <p:sp>
+        <p:nvSpPr>
+          <p:cNvPr id="7" name="Content Placeholder 6">
+            <a:extLst>
+              <a:ext uri="{FF2B5EF4-FFF2-40B4-BE49-F238E27FC236}">
+                <a16:creationId xmlns:a16="http://schemas.microsoft.com/office/drawing/2014/main" id="{5BF5B8BE-F477-B04A-BC9C-86B7DD8E6206}"/>
+              </a:ext>
+            </a:extLst>
+          </p:cNvPr>
+          <p:cNvSpPr>
+            <a:spLocks noGrp="1"/>
+          </p:cNvSpPr>
+          <p:nvPr>
+            <p:ph sz="quarter" idx="4"/>
+          </p:nvPr>
+        </p:nvSpPr>
+        <p:spPr/>
+        <p:txBody>
+          <a:bodyPr>
+            <a:normAutofit fontScale="92500" lnSpcReduction="20000"/>
+          </a:bodyPr>
+          <a:lstStyle/>
+          <a:p>
+            <a:pPr>
+              <a:buFont typeface="Wingdings" pitchFamily="2" charset="2"/>
+              <a:buChar char="§"/>
+            </a:pPr>
+            <a:endParaRPr lang="en-US" sz="3000" dirty="0">
+              <a:solidFill>
+                <a:schemeClr val="bg1"/>
+              </a:solidFill>
+              <a:latin typeface="Aharoni" panose="02010803020104030203" pitchFamily="2" charset="-79"/>
+              <a:cs typeface="Aharoni" panose="02010803020104030203" pitchFamily="2" charset="-79"/>
+            </a:endParaRPr>
+          </a:p>
+          <a:p>
+            <a:pPr>
+              <a:buFont typeface="Wingdings" pitchFamily="2" charset="2"/>
+              <a:buChar char="§"/>
+            </a:pPr>
+            <a:r>
+              <a:rPr lang="en-US" sz="3000" dirty="0">
+                <a:solidFill>
+                  <a:schemeClr val="bg1"/>
+                </a:solidFill>
+                <a:latin typeface="Aharoni" panose="02010803020104030203" pitchFamily="2" charset="-79"/>
+                <a:cs typeface="Aharoni" panose="02010803020104030203" pitchFamily="2" charset="-79"/>
+              </a:rPr>
+              <a:t>Book Taxi (</a:t>
+            </a:r>
+            <a:r>
+              <a:rPr lang="en-US" sz="3000" dirty="0" err="1">
+                <a:solidFill>
+                  <a:schemeClr val="bg1"/>
+                </a:solidFill>
+                <a:latin typeface="Aharoni" panose="02010803020104030203" pitchFamily="2" charset="-79"/>
+                <a:cs typeface="Aharoni" panose="02010803020104030203" pitchFamily="2" charset="-79"/>
+              </a:rPr>
+              <a:t>Sixt</a:t>
+            </a:r>
+            <a:r>
+              <a:rPr lang="en-US" sz="3000" dirty="0">
+                <a:solidFill>
+                  <a:schemeClr val="bg1"/>
+                </a:solidFill>
+                <a:latin typeface="Aharoni" panose="02010803020104030203" pitchFamily="2" charset="-79"/>
+                <a:cs typeface="Aharoni" panose="02010803020104030203" pitchFamily="2" charset="-79"/>
+              </a:rPr>
+              <a:t> Ride)</a:t>
+            </a:r>
+          </a:p>
+          <a:p>
+            <a:pPr lvl="1">
+              <a:buFont typeface="Wingdings" pitchFamily="2" charset="2"/>
+              <a:buChar char="§"/>
+            </a:pPr>
+            <a:r>
+              <a:rPr lang="en-US" sz="2600" dirty="0">
+                <a:solidFill>
+                  <a:schemeClr val="accent6"/>
+                </a:solidFill>
+                <a:latin typeface="Aharoni" panose="02010803020104030203" pitchFamily="2" charset="-79"/>
+                <a:cs typeface="Aharoni" panose="02010803020104030203" pitchFamily="2" charset="-79"/>
+              </a:rPr>
+              <a:t>Open it up for </a:t>
+            </a:r>
+            <a:r>
+              <a:rPr lang="en-US" sz="2600" dirty="0" err="1">
+                <a:solidFill>
+                  <a:schemeClr val="accent6"/>
+                </a:solidFill>
+                <a:latin typeface="Aharoni" panose="02010803020104030203" pitchFamily="2" charset="-79"/>
+                <a:cs typeface="Aharoni" panose="02010803020104030203" pitchFamily="2" charset="-79"/>
+              </a:rPr>
+              <a:t>Sixt</a:t>
+            </a:r>
+            <a:r>
+              <a:rPr lang="en-US" sz="2600" dirty="0">
+                <a:solidFill>
+                  <a:schemeClr val="accent6"/>
+                </a:solidFill>
+                <a:latin typeface="Aharoni" panose="02010803020104030203" pitchFamily="2" charset="-79"/>
+                <a:cs typeface="Aharoni" panose="02010803020104030203" pitchFamily="2" charset="-79"/>
+              </a:rPr>
+              <a:t> Mixed 2go</a:t>
+            </a:r>
+          </a:p>
+          <a:p>
+            <a:pPr>
+              <a:buFont typeface="Wingdings" pitchFamily="2" charset="2"/>
+              <a:buChar char="§"/>
+            </a:pPr>
+            <a:endParaRPr lang="en-US" sz="3000" dirty="0">
+              <a:solidFill>
+                <a:schemeClr val="accent6"/>
+              </a:solidFill>
+              <a:latin typeface="Aharoni" panose="02010803020104030203" pitchFamily="2" charset="-79"/>
+              <a:cs typeface="Aharoni" panose="02010803020104030203" pitchFamily="2" charset="-79"/>
+            </a:endParaRPr>
+          </a:p>
+          <a:p>
+            <a:pPr>
+              <a:buFont typeface="Wingdings" pitchFamily="2" charset="2"/>
+              <a:buChar char="§"/>
+            </a:pPr>
+            <a:r>
+              <a:rPr lang="en-US" sz="3000" dirty="0">
+                <a:solidFill>
+                  <a:schemeClr val="accent6"/>
+                </a:solidFill>
+                <a:latin typeface="Aharoni" panose="02010803020104030203" pitchFamily="2" charset="-79"/>
+                <a:cs typeface="Aharoni" panose="02010803020104030203" pitchFamily="2" charset="-79"/>
+              </a:rPr>
+              <a:t>Join available </a:t>
+            </a:r>
+            <a:r>
+              <a:rPr lang="en-US" sz="3000" dirty="0" err="1">
+                <a:solidFill>
+                  <a:schemeClr val="accent6"/>
+                </a:solidFill>
+                <a:latin typeface="Aharoni" panose="02010803020104030203" pitchFamily="2" charset="-79"/>
+                <a:cs typeface="Aharoni" panose="02010803020104030203" pitchFamily="2" charset="-79"/>
+              </a:rPr>
+              <a:t>Sixt</a:t>
+            </a:r>
+            <a:r>
+              <a:rPr lang="en-US" sz="3000" dirty="0">
+                <a:solidFill>
+                  <a:schemeClr val="accent6"/>
+                </a:solidFill>
+                <a:latin typeface="Aharoni" panose="02010803020104030203" pitchFamily="2" charset="-79"/>
+                <a:cs typeface="Aharoni" panose="02010803020104030203" pitchFamily="2" charset="-79"/>
+              </a:rPr>
+              <a:t> Share with </a:t>
+            </a:r>
+            <a:r>
+              <a:rPr lang="en-US" sz="3000" dirty="0" err="1">
+                <a:solidFill>
+                  <a:schemeClr val="accent6"/>
+                </a:solidFill>
+                <a:latin typeface="Aharoni" panose="02010803020104030203" pitchFamily="2" charset="-79"/>
+                <a:cs typeface="Aharoni" panose="02010803020104030203" pitchFamily="2" charset="-79"/>
+              </a:rPr>
+              <a:t>Sixt</a:t>
+            </a:r>
+            <a:r>
+              <a:rPr lang="en-US" sz="3000" dirty="0">
+                <a:solidFill>
+                  <a:schemeClr val="accent6"/>
+                </a:solidFill>
+                <a:latin typeface="Aharoni" panose="02010803020104030203" pitchFamily="2" charset="-79"/>
+                <a:cs typeface="Aharoni" panose="02010803020104030203" pitchFamily="2" charset="-79"/>
+              </a:rPr>
+              <a:t> mixed 2go</a:t>
+            </a:r>
+          </a:p>
+          <a:p>
+            <a:pPr>
+              <a:buFont typeface="Wingdings" pitchFamily="2" charset="2"/>
+              <a:buChar char="§"/>
+            </a:pPr>
+            <a:endParaRPr lang="en-US" sz="3000" dirty="0">
+              <a:solidFill>
+                <a:schemeClr val="bg1"/>
+              </a:solidFill>
+              <a:latin typeface="Aharoni" panose="02010803020104030203" pitchFamily="2" charset="-79"/>
+              <a:cs typeface="Aharoni" panose="02010803020104030203" pitchFamily="2" charset="-79"/>
+            </a:endParaRPr>
+          </a:p>
+          <a:p>
+            <a:pPr>
+              <a:buFont typeface="Wingdings" pitchFamily="2" charset="2"/>
+              <a:buChar char="§"/>
+            </a:pPr>
+            <a:r>
+              <a:rPr lang="en-US" sz="3000" dirty="0">
+                <a:solidFill>
+                  <a:schemeClr val="accent6"/>
+                </a:solidFill>
+                <a:latin typeface="Aharoni" panose="02010803020104030203" pitchFamily="2" charset="-79"/>
+                <a:cs typeface="Aharoni" panose="02010803020104030203" pitchFamily="2" charset="-79"/>
+              </a:rPr>
+              <a:t>Join available Taxi with </a:t>
+            </a:r>
+            <a:r>
+              <a:rPr lang="en-US" sz="3000" dirty="0" err="1">
+                <a:solidFill>
+                  <a:schemeClr val="accent6"/>
+                </a:solidFill>
+                <a:latin typeface="Aharoni" panose="02010803020104030203" pitchFamily="2" charset="-79"/>
+                <a:cs typeface="Aharoni" panose="02010803020104030203" pitchFamily="2" charset="-79"/>
+              </a:rPr>
+              <a:t>Sixt</a:t>
+            </a:r>
+            <a:r>
+              <a:rPr lang="en-US" sz="3000" dirty="0">
+                <a:solidFill>
+                  <a:schemeClr val="accent6"/>
+                </a:solidFill>
+                <a:latin typeface="Aharoni" panose="02010803020104030203" pitchFamily="2" charset="-79"/>
+                <a:cs typeface="Aharoni" panose="02010803020104030203" pitchFamily="2" charset="-79"/>
+              </a:rPr>
+              <a:t> mixed 2go</a:t>
+            </a:r>
+          </a:p>
+          <a:p>
+            <a:pPr>
+              <a:buFont typeface="Wingdings" pitchFamily="2" charset="2"/>
+              <a:buChar char="§"/>
+            </a:pPr>
+            <a:endParaRPr lang="en-US" sz="3000" dirty="0">
+              <a:solidFill>
+                <a:schemeClr val="bg1"/>
+              </a:solidFill>
+              <a:latin typeface="Aharoni" panose="02010803020104030203" pitchFamily="2" charset="-79"/>
+              <a:cs typeface="Aharoni" panose="02010803020104030203" pitchFamily="2" charset="-79"/>
+            </a:endParaRPr>
           </a:p>
         </p:txBody>
       </p:sp>
     </p:spTree>
     <p:extLst>
       <p:ext uri="{BB962C8B-B14F-4D97-AF65-F5344CB8AC3E}">
-        <p14:creationId xmlns:p14="http://schemas.microsoft.com/office/powerpoint/2010/main" val="936969132"/>
+        <p14:creationId xmlns:p14="http://schemas.microsoft.com/office/powerpoint/2010/main" val="516349383"/>
       </p:ext>
     </p:extLst>
   </p:cSld>
@@ -5720,7 +5843,7 @@
                 <a:latin typeface="Aharoni" panose="02010803020104030203" pitchFamily="2" charset="-79"/>
                 <a:cs typeface="Aharoni" panose="02010803020104030203" pitchFamily="2" charset="-79"/>
               </a:rPr>
-              <a:t>Demo</a:t>
+              <a:t>Work Hand in Hand</a:t>
             </a:r>
           </a:p>
         </p:txBody>
@@ -5745,6 +5868,144 @@
         <p:txBody>
           <a:bodyPr/>
           <a:lstStyle/>
+          <a:p>
+            <a:pPr marL="514350" indent="-514350">
+              <a:buFont typeface="+mj-lt"/>
+              <a:buAutoNum type="arabicPeriod"/>
+            </a:pPr>
+            <a:r>
+              <a:rPr lang="en-US" sz="3600" dirty="0">
+                <a:solidFill>
+                  <a:schemeClr val="bg1"/>
+                </a:solidFill>
+                <a:latin typeface="Aharoni" panose="02010803020104030203" pitchFamily="2" charset="-79"/>
+                <a:cs typeface="Aharoni" panose="02010803020104030203" pitchFamily="2" charset="-79"/>
+              </a:rPr>
+              <a:t>Alice books a suggested </a:t>
+            </a:r>
+            <a:r>
+              <a:rPr lang="en-US" sz="3600" dirty="0" err="1">
+                <a:solidFill>
+                  <a:schemeClr val="bg1"/>
+                </a:solidFill>
+                <a:latin typeface="Aharoni" panose="02010803020104030203" pitchFamily="2" charset="-79"/>
+                <a:cs typeface="Aharoni" panose="02010803020104030203" pitchFamily="2" charset="-79"/>
+              </a:rPr>
+              <a:t>Sixt</a:t>
+            </a:r>
+            <a:r>
+              <a:rPr lang="en-US" sz="3600" dirty="0">
+                <a:solidFill>
+                  <a:schemeClr val="bg1"/>
+                </a:solidFill>
+                <a:latin typeface="Aharoni" panose="02010803020104030203" pitchFamily="2" charset="-79"/>
+                <a:cs typeface="Aharoni" panose="02010803020104030203" pitchFamily="2" charset="-79"/>
+              </a:rPr>
+              <a:t> Share trip ahead with </a:t>
+            </a:r>
+            <a:r>
+              <a:rPr lang="en-US" sz="3600" dirty="0" err="1">
+                <a:solidFill>
+                  <a:schemeClr val="bg1"/>
+                </a:solidFill>
+                <a:latin typeface="Aharoni" panose="02010803020104030203" pitchFamily="2" charset="-79"/>
+                <a:cs typeface="Aharoni" panose="02010803020104030203" pitchFamily="2" charset="-79"/>
+              </a:rPr>
+              <a:t>Sixt</a:t>
+            </a:r>
+            <a:r>
+              <a:rPr lang="en-US" sz="3600" dirty="0">
+                <a:solidFill>
+                  <a:schemeClr val="bg1"/>
+                </a:solidFill>
+                <a:latin typeface="Aharoni" panose="02010803020104030203" pitchFamily="2" charset="-79"/>
+                <a:cs typeface="Aharoni" panose="02010803020104030203" pitchFamily="2" charset="-79"/>
+              </a:rPr>
+              <a:t> Calendar, opens it up for mixed 2go</a:t>
+            </a:r>
+          </a:p>
+          <a:p>
+            <a:pPr marL="514350" indent="-514350">
+              <a:buFont typeface="+mj-lt"/>
+              <a:buAutoNum type="arabicPeriod"/>
+            </a:pPr>
+            <a:endParaRPr lang="en-US" sz="3600" dirty="0">
+              <a:solidFill>
+                <a:schemeClr val="bg1"/>
+              </a:solidFill>
+              <a:latin typeface="Aharoni" panose="02010803020104030203" pitchFamily="2" charset="-79"/>
+              <a:cs typeface="Aharoni" panose="02010803020104030203" pitchFamily="2" charset="-79"/>
+            </a:endParaRPr>
+          </a:p>
+          <a:p>
+            <a:pPr marL="514350" indent="-514350">
+              <a:buFont typeface="+mj-lt"/>
+              <a:buAutoNum type="arabicPeriod"/>
+            </a:pPr>
+            <a:r>
+              <a:rPr lang="en-US" sz="3600" dirty="0">
+                <a:solidFill>
+                  <a:schemeClr val="bg1"/>
+                </a:solidFill>
+                <a:latin typeface="Aharoni" panose="02010803020104030203" pitchFamily="2" charset="-79"/>
+                <a:cs typeface="Aharoni" panose="02010803020104030203" pitchFamily="2" charset="-79"/>
+              </a:rPr>
+              <a:t>Bob joins Alice’s trip, seeing it as an option in his </a:t>
+            </a:r>
+            <a:r>
+              <a:rPr lang="en-US" sz="3600" dirty="0" err="1">
+                <a:solidFill>
+                  <a:schemeClr val="bg1"/>
+                </a:solidFill>
+                <a:latin typeface="Aharoni" panose="02010803020104030203" pitchFamily="2" charset="-79"/>
+                <a:cs typeface="Aharoni" panose="02010803020104030203" pitchFamily="2" charset="-79"/>
+              </a:rPr>
+              <a:t>Sixt</a:t>
+            </a:r>
+            <a:r>
+              <a:rPr lang="en-US" sz="3600" dirty="0">
+                <a:solidFill>
+                  <a:schemeClr val="bg1"/>
+                </a:solidFill>
+                <a:latin typeface="Aharoni" panose="02010803020104030203" pitchFamily="2" charset="-79"/>
+                <a:cs typeface="Aharoni" panose="02010803020104030203" pitchFamily="2" charset="-79"/>
+              </a:rPr>
+              <a:t> Calendar</a:t>
+            </a:r>
+            <a:endParaRPr lang="en-US" sz="3200" dirty="0">
+              <a:solidFill>
+                <a:schemeClr val="bg1"/>
+              </a:solidFill>
+              <a:latin typeface="Aharoni" panose="02010803020104030203" pitchFamily="2" charset="-79"/>
+              <a:cs typeface="Aharoni" panose="02010803020104030203" pitchFamily="2" charset="-79"/>
+            </a:endParaRPr>
+          </a:p>
+          <a:p>
+            <a:pPr marL="514350" indent="-514350">
+              <a:buFont typeface="+mj-lt"/>
+              <a:buAutoNum type="arabicPeriod"/>
+            </a:pPr>
+            <a:endParaRPr lang="en-US" sz="3600" dirty="0">
+              <a:solidFill>
+                <a:schemeClr val="bg1"/>
+              </a:solidFill>
+              <a:latin typeface="Aharoni" panose="02010803020104030203" pitchFamily="2" charset="-79"/>
+              <a:cs typeface="Aharoni" panose="02010803020104030203" pitchFamily="2" charset="-79"/>
+            </a:endParaRPr>
+          </a:p>
+          <a:p>
+            <a:pPr marL="514350" indent="-514350">
+              <a:buFont typeface="+mj-lt"/>
+              <a:buAutoNum type="arabicPeriod"/>
+            </a:pPr>
+            <a:endParaRPr lang="en-US" sz="3200" dirty="0">
+              <a:solidFill>
+                <a:schemeClr val="bg1"/>
+              </a:solidFill>
+              <a:latin typeface="Aharoni" panose="02010803020104030203" pitchFamily="2" charset="-79"/>
+              <a:cs typeface="Aharoni" panose="02010803020104030203" pitchFamily="2" charset="-79"/>
+            </a:endParaRPr>
+          </a:p>
           <a:p>
             <a:endParaRPr lang="en-US" dirty="0"/>
           </a:p>
@@ -5753,7 +6014,7 @@
     </p:spTree>
     <p:extLst>
       <p:ext uri="{BB962C8B-B14F-4D97-AF65-F5344CB8AC3E}">
-        <p14:creationId xmlns:p14="http://schemas.microsoft.com/office/powerpoint/2010/main" val="2777225790"/>
+        <p14:creationId xmlns:p14="http://schemas.microsoft.com/office/powerpoint/2010/main" val="936969132"/>
       </p:ext>
     </p:extLst>
   </p:cSld>
@@ -5809,6 +6070,95 @@
                 <a:latin typeface="Aharoni" panose="02010803020104030203" pitchFamily="2" charset="-79"/>
                 <a:cs typeface="Aharoni" panose="02010803020104030203" pitchFamily="2" charset="-79"/>
               </a:rPr>
+              <a:t>Demo</a:t>
+            </a:r>
+          </a:p>
+        </p:txBody>
+      </p:sp>
+      <p:sp>
+        <p:nvSpPr>
+          <p:cNvPr id="3" name="Content Placeholder 2">
+            <a:extLst>
+              <a:ext uri="{FF2B5EF4-FFF2-40B4-BE49-F238E27FC236}">
+                <a16:creationId xmlns:a16="http://schemas.microsoft.com/office/drawing/2014/main" id="{B8CCBDC4-5E1F-1A43-93A7-3D82752D6A8D}"/>
+              </a:ext>
+            </a:extLst>
+          </p:cNvPr>
+          <p:cNvSpPr>
+            <a:spLocks noGrp="1"/>
+          </p:cNvSpPr>
+          <p:nvPr>
+            <p:ph idx="1"/>
+          </p:nvPr>
+        </p:nvSpPr>
+        <p:spPr/>
+        <p:txBody>
+          <a:bodyPr/>
+          <a:lstStyle/>
+          <a:p>
+            <a:endParaRPr lang="en-US" dirty="0"/>
+          </a:p>
+        </p:txBody>
+      </p:sp>
+    </p:spTree>
+    <p:extLst>
+      <p:ext uri="{BB962C8B-B14F-4D97-AF65-F5344CB8AC3E}">
+        <p14:creationId xmlns:p14="http://schemas.microsoft.com/office/powerpoint/2010/main" val="2777225790"/>
+      </p:ext>
+    </p:extLst>
+  </p:cSld>
+  <p:clrMapOvr>
+    <a:masterClrMapping/>
+  </p:clrMapOvr>
+</p:sld>
+</file>
+
+<file path=ppt/slides/slide9.xml><?xml version="1.0" encoding="utf-8"?>
+<p:sld xmlns:a="http://schemas.openxmlformats.org/drawingml/2006/main" xmlns:r="http://schemas.openxmlformats.org/officeDocument/2006/relationships" xmlns:p="http://schemas.openxmlformats.org/presentationml/2006/main">
+  <p:cSld>
+    <p:spTree>
+      <p:nvGrpSpPr>
+        <p:cNvPr id="1" name=""/>
+        <p:cNvGrpSpPr/>
+        <p:nvPr/>
+      </p:nvGrpSpPr>
+      <p:grpSpPr>
+        <a:xfrm>
+          <a:off x="0" y="0"/>
+          <a:ext cx="0" cy="0"/>
+          <a:chOff x="0" y="0"/>
+          <a:chExt cx="0" cy="0"/>
+        </a:xfrm>
+      </p:grpSpPr>
+      <p:sp>
+        <p:nvSpPr>
+          <p:cNvPr id="2" name="Title 1">
+            <a:extLst>
+              <a:ext uri="{FF2B5EF4-FFF2-40B4-BE49-F238E27FC236}">
+                <a16:creationId xmlns:a16="http://schemas.microsoft.com/office/drawing/2014/main" id="{298A8042-0785-4E4A-8727-E63114504C02}"/>
+              </a:ext>
+            </a:extLst>
+          </p:cNvPr>
+          <p:cNvSpPr>
+            <a:spLocks noGrp="1"/>
+          </p:cNvSpPr>
+          <p:nvPr>
+            <p:ph type="title"/>
+          </p:nvPr>
+        </p:nvSpPr>
+        <p:spPr/>
+        <p:txBody>
+          <a:bodyPr/>
+          <a:lstStyle/>
+          <a:p>
+            <a:r>
+              <a:rPr lang="en-US" dirty="0">
+                <a:solidFill>
+                  <a:srgbClr val="FF5F00"/>
+                </a:solidFill>
+                <a:latin typeface="Aharoni" panose="02010803020104030203" pitchFamily="2" charset="-79"/>
+                <a:cs typeface="Aharoni" panose="02010803020104030203" pitchFamily="2" charset="-79"/>
+              </a:rPr>
               <a:t>Benefits for Everyone</a:t>
             </a:r>
           </a:p>
@@ -6079,7 +6429,7 @@
                 <a:latin typeface="Aharoni" panose="02010803020104030203" pitchFamily="2" charset="-79"/>
                 <a:cs typeface="Aharoni" panose="02010803020104030203" pitchFamily="2" charset="-79"/>
               </a:rPr>
-              <a:t>Save together the environment by making car sharing efficient</a:t>
+              <a:t>Save the environment together by making car sharing efficient</a:t>
             </a:r>
           </a:p>
         </p:txBody>
